--- a/cursos/recursos/desequilibrios-de-material/07-pareja-de-alfiles-en-el-medio-juego.pptx
+++ b/cursos/recursos/desequilibrios-de-material/07-pareja-de-alfiles-en-el-medio-juego.pptx
@@ -3489,7 +3489,7 @@
                 </a:solidFill>
                 <a:latin typeface="Calibri"/>
               </a:rPr>
-              <a:t>Pista: Pensá en un avance de peón que, casualmente, también siga la regla del color estudiada en este capítulo.</a:t>
+              <a:t>Pista: Piensa en un avance de peón que, casualmente, también siga la regla del color estudiada en este capítulo.</a:t>
             </a:r>
           </a:p>
         </p:txBody>
@@ -3812,7 +3812,7 @@
                 </a:solidFill>
                 <a:latin typeface="Calibri"/>
               </a:rPr>
-              <a:t>Pista: Pensá en una jugada de torre que invada la sexta fila, amenazando también el flanco de dama.</a:t>
+              <a:t>Pista: Piensa en una jugada de torre que invada la sexta fila, amenazando también el flanco de dama.</a:t>
             </a:r>
           </a:p>
         </p:txBody>
@@ -4135,7 +4135,7 @@
                 </a:solidFill>
                 <a:latin typeface="Calibri"/>
               </a:rPr>
-              <a:t>Pista: Pensá en una jugada de torre que invada todavía más profundo en el campo negro, sin dar ningún respiro.</a:t>
+              <a:t>Pista: Piensa en una jugada de torre que invada todavía más profundo en el campo negro, sin dar ningún respiro.</a:t>
             </a:r>
           </a:p>
         </p:txBody>
@@ -4458,7 +4458,7 @@
                 </a:solidFill>
                 <a:latin typeface="Calibri"/>
               </a:rPr>
-              <a:t>Pista: Pensá en capturar con la torre una pieza defensiva clave, aunque parezca entregar demasiado material a cambio.</a:t>
+              <a:t>Pista: Piensa en capturar con la torre una pieza defensiva clave, aunque parezca entregar demasiado material a cambio.</a:t>
             </a:r>
           </a:p>
         </p:txBody>
@@ -5313,7 +5313,7 @@
                 </a:solidFill>
                 <a:latin typeface="Calibri"/>
               </a:rPr>
-              <a:t>Pista: Pensá en avanzar un peón central que fije la estructura de peones negra y le quite flexibilidad a su alfil de casillas claras.</a:t>
+              <a:t>Pista: Piensa en avanzar un peón central que fije la estructura de peones negra y le quite flexibilidad a su alfil de casillas claras.</a:t>
             </a:r>
           </a:p>
         </p:txBody>
@@ -5636,7 +5636,7 @@
                 </a:solidFill>
                 <a:latin typeface="Calibri"/>
               </a:rPr>
-              <a:t>Pista: Pensá en un salto de caballo hacia el centro que amenace capturas en f7 o en g6 si las negras no reaccionan con precisión.</a:t>
+              <a:t>Pista: Piensa en un salto de caballo hacia el centro que amenace capturas en f7 o en g6 si las negras no reaccionan con precisión.</a:t>
             </a:r>
           </a:p>
         </p:txBody>
@@ -5959,7 +5959,7 @@
                 </a:solidFill>
                 <a:latin typeface="Calibri"/>
               </a:rPr>
-              <a:t>Pista: Pensá en avanzar el otro peón central, el que todavía no se ha movido, para abrir la posición todavía más.</a:t>
+              <a:t>Pista: Piensa en avanzar el otro peón central, el que todavía no se ha movido, para abrir la posición todavía más.</a:t>
             </a:r>
           </a:p>
         </p:txBody>
@@ -6457,7 +6457,7 @@
                 </a:solidFill>
                 <a:latin typeface="Calibri"/>
               </a:rPr>
-              <a:t>Pista: Pensá en un avance de peón del flanco de rey que ataque directamente al peón g6 negro.</a:t>
+              <a:t>Pista: Piensa en un avance de peón del flanco de rey que ataque directamente al peón g6 negro.</a:t>
             </a:r>
           </a:p>
         </p:txBody>
@@ -6780,7 +6780,7 @@
                 </a:solidFill>
                 <a:latin typeface="Calibri"/>
               </a:rPr>
-              <a:t>Pista: Pensá en capturar con la torre una pieza que defiende directamente al rey negro, aunque eso implique entregar material.</a:t>
+              <a:t>Pista: Piensa en capturar con la torre una pieza que defiende directamente al rey negro, aunque eso implique entregar material.</a:t>
             </a:r>
           </a:p>
         </p:txBody>
@@ -7635,7 +7635,7 @@
                 </a:solidFill>
                 <a:latin typeface="Calibri"/>
               </a:rPr>
-              <a:t>Pista: Pensá en qué pieza puede interponerse en la casilla del jaque sin quedar en peligro de un ataque doble del caballo blanco.</a:t>
+              <a:t>Pista: Piensa en qué pieza puede interponerse en la casilla del jaque sin quedar en peligro de un ataque doble del caballo blanco.</a:t>
             </a:r>
           </a:p>
         </p:txBody>
@@ -7958,7 +7958,7 @@
                 </a:solidFill>
                 <a:latin typeface="Calibri"/>
               </a:rPr>
-              <a:t>Pista: Pensá en un avance de peón que le quite justamente esa casilla al caballo rival.</a:t>
+              <a:t>Pista: Piensa en un avance de peón que le quite justamente esa casilla al caballo rival.</a:t>
             </a:r>
           </a:p>
         </p:txBody>
@@ -8281,7 +8281,7 @@
                 </a:solidFill>
                 <a:latin typeface="Calibri"/>
               </a:rPr>
-              <a:t>Pista: Pensá en una jugada de alfil que apunte directamente hacia la dama blanca a lo largo de una diagonal larga.</a:t>
+              <a:t>Pista: Piensa en una jugada de alfil que apunte directamente hacia la dama blanca a lo largo de una diagonal larga.</a:t>
             </a:r>
           </a:p>
         </p:txBody>
@@ -8604,7 +8604,7 @@
                 </a:solidFill>
                 <a:latin typeface="Calibri"/>
               </a:rPr>
-              <a:t>Pista: Pensá en una jugada de torre que se sume a la presión sobre la columna c, sin apurarse a capturar material todavía.</a:t>
+              <a:t>Pista: Piensa en una jugada de torre que se sume a la presión sobre la columna c, sin apurarse a capturar material todavía.</a:t>
             </a:r>
           </a:p>
         </p:txBody>
@@ -8841,7 +8841,7 @@
                 </a:solidFill>
                 <a:latin typeface="Calibri"/>
               </a:rPr>
-              <a:t>•  Frente a un solo peón débil del rival, jugá para mantener la presión constante en vez de apurarte a recuperarlo: a veces conviene reforzar amenazas antes de capturar.</a:t>
+              <a:t>•  Frente a un solo peón débil del rival, juega para mantener la presión constante en vez de apurarte a recuperarlo: a veces conviene reforzar amenazas antes de capturar.</a:t>
             </a:r>
           </a:p>
           <a:p>
@@ -8857,7 +8857,7 @@
                 </a:solidFill>
                 <a:latin typeface="Calibri"/>
               </a:rPr>
-              <a:t>•  Buscá activamente clavadas a lo largo de diagonales largas cuando tenés la pareja de alfiles: pueden convertirse en el motivo táctico que decida la partida.</a:t>
+              <a:t>•  Busca activamente clavadas a lo largo de diagonales largas cuando tienes la pareja de alfiles: pueden convertirse en el motivo táctico que decida la partida.</a:t>
             </a:r>
           </a:p>
         </p:txBody>
@@ -9618,7 +9618,7 @@
                 </a:solidFill>
                 <a:latin typeface="Calibri"/>
               </a:rPr>
-              <a:t>Pista: Pensá en un avance de peón en el flanco de rey que abra líneas antes de que las blancas completen su reagrupación.</a:t>
+              <a:t>Pista: Piensa en un avance de peón en el flanco de rey que abra líneas antes de que las blancas completen su reagrupación.</a:t>
             </a:r>
           </a:p>
         </p:txBody>
@@ -9941,7 +9941,7 @@
                 </a:solidFill>
                 <a:latin typeface="Calibri"/>
               </a:rPr>
-              <a:t>Pista: Pensá en un avance de peón que ataque directamente la estructura de peones blanca en el flanco de rey.</a:t>
+              <a:t>Pista: Piensa en un avance de peón que ataque directamente la estructura de peones blanca en el flanco de rey.</a:t>
             </a:r>
           </a:p>
         </p:txBody>
@@ -10264,7 +10264,7 @@
                 </a:solidFill>
                 <a:latin typeface="Calibri"/>
               </a:rPr>
-              <a:t>Pista: Pensá en seguir avanzando el peón f negro un paso más, restringiendo aún más a las piezas blancas.</a:t>
+              <a:t>Pista: Piensa en seguir avanzando el peón f negro un paso más, restringiendo aún más a las piezas blancas.</a:t>
             </a:r>
           </a:p>
         </p:txBody>
@@ -10485,7 +10485,7 @@
                 </a:solidFill>
                 <a:latin typeface="Calibri"/>
               </a:rPr>
-              <a:t>•  Antes de confiar en la pareja de alfiles, evaluá si esos alfiles realmente pueden cooperar pronto: si el plan para lograrlo es demasiado lento, el rival puede golpear primero.</a:t>
+              <a:t>•  Antes de confiar en la pareja de alfiles, evalúa si esos alfiles realmente pueden cooperar pronto: si el plan para lograrlo es demasiado lento, el rival puede golpear primero.</a:t>
             </a:r>
           </a:p>
           <a:p>
@@ -10501,7 +10501,7 @@
                 </a:solidFill>
                 <a:latin typeface="Calibri"/>
               </a:rPr>
-              <a:t>•  Tené cuidado con avances centrales que, aunque creen un peón pasado, terminen fijando tus propios peones en el color de tu alfil restante: eso puede anular por completo su utilidad.</a:t>
+              <a:t>•  Ten cuidado con avances centrales que, aunque creen un peón pasado, terminen fijando tus propios peones en el color de tu alfil restante: eso puede anular por completo su utilidad.</a:t>
             </a:r>
           </a:p>
           <a:p>
@@ -10517,7 +10517,7 @@
                 </a:solidFill>
                 <a:latin typeface="Calibri"/>
               </a:rPr>
-              <a:t>•  Frente a un rival con la pareja de alfiles pero sin plan inmediato, buscá activamente contrajuego rápido en vez de esperar pasivamente a que esa ventaja teórica se materialice.</a:t>
+              <a:t>•  Frente a un rival con la pareja de alfiles pero sin plan inmediato, busca activamente contrajuego rápido en vez de esperar pasivamente a que esa ventaja teórica se materialice.</a:t>
             </a:r>
           </a:p>
         </p:txBody>
@@ -10660,7 +10660,7 @@
                 </a:solidFill>
                 <a:latin typeface="Calibri"/>
               </a:rPr>
-              <a:t>Buscá en Leitao–Cubas el momento en que el alfil de b2, aparentemente pasivo, empieza a influir decisivamente en la partida, y anotá qué jugadas rivales impide. Jugá después contra el motor la posición de Tomashevsky–Svidler con las negras, buscando el momento justo para ...f6-f5 explotando la falta de cooperación entre los alfiles blancos.</a:t>
+              <a:t>Busca en Leitao–Cubas el momento en que el alfil de b2, aparentemente pasivo, empieza a influir decisivamente en la partida, y anota qué jugadas rivales impide. Juega después contra el motor la posición de Tomashevsky–Svidler con las negras, buscando el momento justo para ...f6-f5 explotando la falta de cooperación entre los alfiles blancos.</a:t>
             </a:r>
           </a:p>
           <a:p>
@@ -10692,7 +10692,7 @@
                 </a:solidFill>
                 <a:latin typeface="Calibri"/>
               </a:rPr>
-              <a:t>En la página del curso podés recorrer cada partida con los comentarios, adivinar las jugadas clave en el tablero y continuar cualquier posición contra el motor (Stockfish). La hoja de ejercicios en PDF reúne los momentos clave de esta lección para resolver sin tablero.</a:t>
+              <a:t>En la página del curso puedes recorrer cada partida con los comentarios, adivinar las jugadas clave en el tablero y continuar cualquier posición contra el motor (Stockfish). La hoja de ejercicios en PDF reúne los momentos clave de esta lección para resolver sin tablero.</a:t>
             </a:r>
           </a:p>
         </p:txBody>
@@ -10731,7 +10731,7 @@
                 </a:solidFill>
                 <a:latin typeface="Calibri"/>
               </a:rPr>
-              <a:t>•  Primero recorré la partida completa leyendo los comentarios.</a:t>
+              <a:t>•  Primero recorre la partida completa leyendo los comentarios.</a:t>
             </a:r>
           </a:p>
           <a:p>
@@ -10747,7 +10747,7 @@
                 </a:solidFill>
                 <a:latin typeface="Calibri"/>
               </a:rPr>
-              <a:t>•  Después hacé el modo "adivinar las jugadas clave" hasta acertar todas.</a:t>
+              <a:t>•  Después haz el modo "adivinar las jugadas clave" hasta acertar todas.</a:t>
             </a:r>
           </a:p>
           <a:p>
@@ -10763,7 +10763,7 @@
                 </a:solidFill>
                 <a:latin typeface="Calibri"/>
               </a:rPr>
-              <a:t>•  Por último respondé el cuestionario y anotá con tus palabras las reglas de la lección.</a:t>
+              <a:t>•  Por último responde el cuestionario y anota con tus palabras las reglas de la lección.</a:t>
             </a:r>
           </a:p>
         </p:txBody>
@@ -11335,7 +11335,7 @@
                 </a:solidFill>
                 <a:latin typeface="Calibri"/>
               </a:rPr>
-              <a:t>•  Comprobá si tus alfiles cooperan (diagonales consecutivas o cruzadas) antes de lanzar el ataque.</a:t>
+              <a:t>•  Comprueba si tus alfiles cooperan (diagonales consecutivas o cruzadas) antes de lanzar el ataque.</a:t>
             </a:r>
           </a:p>
           <a:p>
@@ -11351,7 +11351,7 @@
                 </a:solidFill>
                 <a:latin typeface="Calibri"/>
               </a:rPr>
-              <a:t>•  Ganá espacio cerca del rey rival: con dos alfiles, el rival evitará abrir su propia posición.</a:t>
+              <a:t>•  Gana espacio cerca del rey rival: con dos alfiles, el rival evitará abrir su propia posición.</a:t>
             </a:r>
           </a:p>
           <a:p>
@@ -11367,7 +11367,7 @@
                 </a:solidFill>
                 <a:latin typeface="Calibri"/>
               </a:rPr>
-              <a:t>•  Recordá que cada cambio de un alfil reduce la fuerza del ataque a menos de la mitad.</a:t>
+              <a:t>•  Recuerda que cada cambio de un alfil reduce la fuerza del ataque a menos de la mitad.</a:t>
             </a:r>
           </a:p>
           <a:p>
@@ -11383,7 +11383,7 @@
                 </a:solidFill>
                 <a:latin typeface="Calibri"/>
               </a:rPr>
-              <a:t>•  Si defendés, buscá activamente cambiar uno de los dos alfiles rivales cuanto antes.</a:t>
+              <a:t>•  Si defiendes, busca activamente cambiar uno de los dos alfiles rivales cuanto antes.</a:t>
             </a:r>
           </a:p>
           <a:p>
